--- a/presentation/UNanofabTools/flaskserver/slides/03-Configuration.pptx
+++ b/presentation/UNanofabTools/flaskserver/slides/03-Configuration.pptx
@@ -601,7 +601,7 @@
           <a:p>
             <a:r>
               <a:rPr lang="en-US" dirty="0"/>
-              <a:t>Walk the failure modes a new operator is most likely to hit. The most dangerous is leaving DEBUG_MODE on in production because it quietly turns off two-factor. Leaving the placeholder secret key allows forged logins. The default database password is trivially guessable. And production logging needs a logs folder to exist or the app refuses to start. Each has a one-line fix. This slide is essentially a pre-launch checklist.</a:t>
+              <a:t>Walk the failure modes a new operator is most likely to hit. The most dangerous is leaving DEBUG_MODE on in production because it quietly turns off two-factor. The placeholder secret key would allow forged logins — but the app now fails closed on it: in production it refuses to start if SECRET_KEY is unset or the default, so you can't accidentally ship a forgeable key. The default database password is trivially guessable. And production logging needs a logs folder to exist or the app refuses to start. Each has a one-line fix. This slide is essentially a pre-launch checklist.</a:t>
             </a:r>
             <a:endParaRPr lang="en-US" dirty="0"/>
           </a:p>
@@ -2687,7 +2687,7 @@
                           <a:ea typeface="Calibri" pitchFamily="34" charset="-122"/>
                           <a:cs typeface="Calibri" pitchFamily="34" charset="-120"/>
                         </a:rPr>
-                        <a:t>Logins can be forged → set a strong random value</a:t>
+                        <a:t>Now blocked: production refuses to start on the default/unset key (fail-closed) — set a strong random value</a:t>
                       </a:r>
                       <a:endParaRPr lang="en-US" sz="1150" dirty="0">
                         <a:latin typeface="Calibri" charset="0"/>
